--- a/modules/Statistics/Statistics.pptx
+++ b/modules/Statistics/Statistics.pptx
@@ -15417,6 +15417,26 @@
             </a:pPr>
             <a:r>
               <a:rPr>
+                <a:solidFill>
+                  <a:srgbClr val="06287E"/>
+                </a:solidFill>
+                <a:latin typeface="Courier"/>
+              </a:rPr>
+              <a:t>oddsratio</a:t>
+            </a:r>
+            <a:r>
+              <a:rPr>
+                <a:latin typeface="Courier"/>
+              </a:rPr>
+              <a:t>(predictor, response)</a:t>
+            </a:r>
+          </a:p>
+          <a:p>
+            <a:pPr lvl="0" indent="0">
+              <a:buNone/>
+            </a:pPr>
+            <a:r>
+              <a:rPr>
                 <a:latin typeface="Courier"/>
               </a:rPr>
               <a:t>$data
@@ -16373,6 +16393,14 @@
             <a:r>
               <a:rPr/>
               <a:t>More</a:t>
+            </a:r>
+            <a:r>
+              <a:rPr/>
+              <a:t> </a:t>
+            </a:r>
+            <a:r>
+              <a:rPr/>
+              <a:t>about</a:t>
             </a:r>
             <a:r>
               <a:rPr/>
